--- a/API/L02_google_API/read_google_email/connect_to_google_email.pptx
+++ b/API/L02_google_API/read_google_email/connect_to_google_email.pptx
@@ -10249,10 +10249,10 @@
       </p:grpSpPr>
       <p:pic>
         <p:nvPicPr>
-          <p:cNvPr id="4" name="Picture 3">
+          <p:cNvPr id="3" name="Picture 2">
             <a:extLst>
               <a:ext uri="{FF2B5EF4-FFF2-40B4-BE49-F238E27FC236}">
-                <a16:creationId xmlns:a16="http://schemas.microsoft.com/office/drawing/2014/main" id="{1DB4AD49-98C3-E564-11FE-093FBE509747}"/>
+                <a16:creationId xmlns:a16="http://schemas.microsoft.com/office/drawing/2014/main" id="{7D2AC80C-D3F1-8964-7171-93FDED5A5000}"/>
               </a:ext>
             </a:extLst>
           </p:cNvPr>
@@ -10269,8 +10269,8 @@
         </p:blipFill>
         <p:spPr>
           <a:xfrm>
-            <a:off x="1733730" y="182880"/>
-            <a:ext cx="7985719" cy="6492240"/>
+            <a:off x="4251960" y="121779"/>
+            <a:ext cx="7360685" cy="6614441"/>
           </a:xfrm>
           <a:prstGeom prst="rect">
             <a:avLst/>
